--- a/metro/metro-b02-palette-type.pptx
+++ b/metro/metro-b02-palette-type.pptx
@@ -4482,9 +4482,9 @@
                 <a:solidFill>
                   <a:srgbClr val="14161A"/>
                 </a:solidFill>
-                <a:latin typeface="Space Grotesk"/>
-                <a:ea typeface="Space Grotesk"/>
-                <a:cs typeface="Space Grotesk"/>
+                <a:latin typeface="HK Grotesk"/>
+                <a:ea typeface="HK Grotesk"/>
+                <a:cs typeface="HK Grotesk"/>
               </a:rPr>
               <a:t>North &amp; Oak</a:t>
             </a:r>
@@ -4591,9 +4591,9 @@
                 <a:solidFill>
                   <a:srgbClr val="14161A"/>
                 </a:solidFill>
-                <a:latin typeface="Space Grotesk"/>
-                <a:ea typeface="Space Grotesk"/>
-                <a:cs typeface="Space Grotesk"/>
+                <a:latin typeface="HK Grotesk"/>
+                <a:ea typeface="HK Grotesk"/>
+                <a:cs typeface="HK Grotesk"/>
               </a:rPr>
               <a:t>PALETTE &amp; TYPE</a:t>
             </a:r>
@@ -4630,9 +4630,9 @@
                 <a:solidFill>
                   <a:srgbClr val="8A8F99"/>
                 </a:solidFill>
-                <a:latin typeface="Space Grotesk"/>
-                <a:ea typeface="Space Grotesk"/>
-                <a:cs typeface="Space Grotesk"/>
+                <a:latin typeface="HK Grotesk"/>
+                <a:ea typeface="HK Grotesk"/>
+                <a:cs typeface="HK Grotesk"/>
               </a:rPr>
               <a:t>A cool ink anchor, one electric cobalt, and a bright white ground. Space Grotesk does the display and the text; Space Mono runs the numbers. Nothing decorative — every element earns its place on the grid.</a:t>
             </a:r>
@@ -4770,9 +4770,9 @@
                 <a:solidFill>
                   <a:srgbClr val="14161A"/>
                 </a:solidFill>
-                <a:latin typeface="Space Grotesk"/>
-                <a:ea typeface="Space Grotesk"/>
-                <a:cs typeface="Space Grotesk"/>
+                <a:latin typeface="HK Grotesk"/>
+                <a:ea typeface="HK Grotesk"/>
+                <a:cs typeface="HK Grotesk"/>
               </a:rPr>
               <a:t>Ink</a:t>
             </a:r>
@@ -4840,9 +4840,9 @@
                 <a:solidFill>
                   <a:srgbClr val="8A8F99"/>
                 </a:solidFill>
-                <a:latin typeface="Space Grotesk"/>
-                <a:ea typeface="Space Grotesk"/>
-                <a:cs typeface="Space Grotesk"/>
+                <a:latin typeface="HK Grotesk"/>
+                <a:ea typeface="HK Grotesk"/>
+                <a:cs typeface="HK Grotesk"/>
               </a:rPr>
               <a:t>Primary · headlines</a:t>
             </a:r>
@@ -4910,9 +4910,9 @@
                 <a:solidFill>
                   <a:srgbClr val="14161A"/>
                 </a:solidFill>
-                <a:latin typeface="Space Grotesk"/>
-                <a:ea typeface="Space Grotesk"/>
-                <a:cs typeface="Space Grotesk"/>
+                <a:latin typeface="HK Grotesk"/>
+                <a:ea typeface="HK Grotesk"/>
+                <a:cs typeface="HK Grotesk"/>
               </a:rPr>
               <a:t>Pure White</a:t>
             </a:r>
@@ -4980,9 +4980,9 @@
                 <a:solidFill>
                   <a:srgbClr val="8A8F99"/>
                 </a:solidFill>
-                <a:latin typeface="Space Grotesk"/>
-                <a:ea typeface="Space Grotesk"/>
-                <a:cs typeface="Space Grotesk"/>
+                <a:latin typeface="HK Grotesk"/>
+                <a:ea typeface="HK Grotesk"/>
+                <a:cs typeface="HK Grotesk"/>
               </a:rPr>
               <a:t>Background · cards</a:t>
             </a:r>
@@ -5050,9 +5050,9 @@
                 <a:solidFill>
                   <a:srgbClr val="14161A"/>
                 </a:solidFill>
-                <a:latin typeface="Space Grotesk"/>
-                <a:ea typeface="Space Grotesk"/>
-                <a:cs typeface="Space Grotesk"/>
+                <a:latin typeface="HK Grotesk"/>
+                <a:ea typeface="HK Grotesk"/>
+                <a:cs typeface="HK Grotesk"/>
               </a:rPr>
               <a:t>Cobalt</a:t>
             </a:r>
@@ -5120,9 +5120,9 @@
                 <a:solidFill>
                   <a:srgbClr val="8A8F99"/>
                 </a:solidFill>
-                <a:latin typeface="Space Grotesk"/>
-                <a:ea typeface="Space Grotesk"/>
-                <a:cs typeface="Space Grotesk"/>
+                <a:latin typeface="HK Grotesk"/>
+                <a:ea typeface="HK Grotesk"/>
+                <a:cs typeface="HK Grotesk"/>
               </a:rPr>
               <a:t>Accent only · rules</a:t>
             </a:r>
@@ -5190,9 +5190,9 @@
                 <a:solidFill>
                   <a:srgbClr val="14161A"/>
                 </a:solidFill>
-                <a:latin typeface="Space Grotesk"/>
-                <a:ea typeface="Space Grotesk"/>
-                <a:cs typeface="Space Grotesk"/>
+                <a:latin typeface="HK Grotesk"/>
+                <a:ea typeface="HK Grotesk"/>
+                <a:cs typeface="HK Grotesk"/>
               </a:rPr>
               <a:t>Cool Ground</a:t>
             </a:r>
@@ -5260,9 +5260,9 @@
                 <a:solidFill>
                   <a:srgbClr val="8A8F99"/>
                 </a:solidFill>
-                <a:latin typeface="Space Grotesk"/>
-                <a:ea typeface="Space Grotesk"/>
-                <a:cs typeface="Space Grotesk"/>
+                <a:latin typeface="HK Grotesk"/>
+                <a:ea typeface="HK Grotesk"/>
+                <a:cs typeface="HK Grotesk"/>
               </a:rPr>
               <a:t>Supporting · panel</a:t>
             </a:r>
@@ -5330,9 +5330,9 @@
                 <a:solidFill>
                   <a:srgbClr val="14161A"/>
                 </a:solidFill>
-                <a:latin typeface="Space Grotesk"/>
-                <a:ea typeface="Space Grotesk"/>
-                <a:cs typeface="Space Grotesk"/>
+                <a:latin typeface="HK Grotesk"/>
+                <a:ea typeface="HK Grotesk"/>
+                <a:cs typeface="HK Grotesk"/>
               </a:rPr>
               <a:t>Raised Ink</a:t>
             </a:r>
@@ -5400,9 +5400,9 @@
                 <a:solidFill>
                   <a:srgbClr val="8A8F99"/>
                 </a:solidFill>
-                <a:latin typeface="Space Grotesk"/>
-                <a:ea typeface="Space Grotesk"/>
-                <a:cs typeface="Space Grotesk"/>
+                <a:latin typeface="HK Grotesk"/>
+                <a:ea typeface="HK Grotesk"/>
+                <a:cs typeface="HK Grotesk"/>
               </a:rPr>
               <a:t>Body on light</a:t>
             </a:r>
@@ -5470,9 +5470,9 @@
                 <a:solidFill>
                   <a:srgbClr val="14161A"/>
                 </a:solidFill>
-                <a:latin typeface="Space Grotesk"/>
-                <a:ea typeface="Space Grotesk"/>
-                <a:cs typeface="Space Grotesk"/>
+                <a:latin typeface="HK Grotesk"/>
+                <a:ea typeface="HK Grotesk"/>
+                <a:cs typeface="HK Grotesk"/>
               </a:rPr>
               <a:t>Gray</a:t>
             </a:r>
@@ -5540,9 +5540,9 @@
                 <a:solidFill>
                   <a:srgbClr val="8A8F99"/>
                 </a:solidFill>
-                <a:latin typeface="Space Grotesk"/>
-                <a:ea typeface="Space Grotesk"/>
-                <a:cs typeface="Space Grotesk"/>
+                <a:latin typeface="HK Grotesk"/>
+                <a:ea typeface="HK Grotesk"/>
+                <a:cs typeface="HK Grotesk"/>
               </a:rPr>
               <a:t>Secondary · meta</a:t>
             </a:r>
@@ -5649,9 +5649,9 @@
                 <a:solidFill>
                   <a:srgbClr val="14161A"/>
                 </a:solidFill>
-                <a:latin typeface="Space Grotesk"/>
-                <a:ea typeface="Space Grotesk"/>
-                <a:cs typeface="Space Grotesk"/>
+                <a:latin typeface="HK Grotesk"/>
+                <a:ea typeface="HK Grotesk"/>
+                <a:cs typeface="HK Grotesk"/>
               </a:rPr>
               <a:t>Aa</a:t>
             </a:r>
@@ -5719,9 +5719,9 @@
                 <a:solidFill>
                   <a:srgbClr val="8A8F99"/>
                 </a:solidFill>
-                <a:latin typeface="Space Grotesk"/>
-                <a:ea typeface="Space Grotesk"/>
-                <a:cs typeface="Space Grotesk"/>
+                <a:latin typeface="HK Grotesk"/>
+                <a:ea typeface="HK Grotesk"/>
+                <a:cs typeface="HK Grotesk"/>
               </a:rPr>
               <a:t>Display</a:t>
             </a:r>
@@ -5758,9 +5758,9 @@
                 <a:solidFill>
                   <a:srgbClr val="14161A"/>
                 </a:solidFill>
-                <a:latin typeface="Space Grotesk"/>
-                <a:ea typeface="Space Grotesk"/>
-                <a:cs typeface="Space Grotesk"/>
+                <a:latin typeface="HK Grotesk"/>
+                <a:ea typeface="HK Grotesk"/>
+                <a:cs typeface="HK Grotesk"/>
               </a:rPr>
               <a:t>Aa</a:t>
             </a:r>
@@ -5828,9 +5828,9 @@
                 <a:solidFill>
                   <a:srgbClr val="8A8F99"/>
                 </a:solidFill>
-                <a:latin typeface="Space Grotesk"/>
-                <a:ea typeface="Space Grotesk"/>
-                <a:cs typeface="Space Grotesk"/>
+                <a:latin typeface="HK Grotesk"/>
+                <a:ea typeface="HK Grotesk"/>
+                <a:cs typeface="HK Grotesk"/>
               </a:rPr>
               <a:t>Body / Labels</a:t>
             </a:r>
@@ -5937,9 +5937,9 @@
                 <a:solidFill>
                   <a:srgbClr val="8A8F99"/>
                 </a:solidFill>
-                <a:latin typeface="Space Grotesk"/>
-                <a:ea typeface="Space Grotesk"/>
-                <a:cs typeface="Space Grotesk"/>
+                <a:latin typeface="HK Grotesk"/>
+                <a:ea typeface="HK Grotesk"/>
+                <a:cs typeface="HK Grotesk"/>
               </a:rPr>
               <a:t>Meta / Specs</a:t>
             </a:r>
